--- a/whomakestherules/H4R2026_FactSheet_CH7_A38.pptx
+++ b/whomakestherules/H4R2026_FactSheet_CH7_A38.pptx
@@ -3985,22 +3985,28 @@
               <a:buNone/>
             </a:pPr>
             <a:r>
-              <a:rPr lang="de-DE" sz="1100" dirty="0"/>
-              <a:t>Railway regulations are scattered across heterogeneous PDF/Word documents. Nobody can efficiently find the relevant rule. Changes between versions are invisible. Rules are free text – and worse: they are interpreted by individuals based on their personal context, leading to inconsistent, non-deterministic application across organisations and countries.</a:t>
-            </a:r>
-            <a:r>
-              <a:rPr lang="de-DE" sz="1050" dirty="0" err="1"/>
-              <a:t/>
-            </a:r>
-            <a:r>
-              <a:rPr lang="de-DE" sz="1050" dirty="0"/>
-              <a:t/>
-            </a:r>
-            <a:r>
-              <a:rPr lang="de-DE" sz="1050" dirty="0" err="1"/>
-              <a:t/>
-            </a:r>
-            <a:endParaRPr lang="de-DE" sz="1050" dirty="0"/>
+              <a:rPr lang="de-DE" sz="1600" dirty="0"/>
+              <a:t>Railway regulations are scattered across heterogeneous PDF/Word documents. </a:t>
+            </a:r>
+          </a:p>
+          <a:p>
+            <a:pPr marL="0" indent="0">
+              <a:buNone/>
+            </a:pPr>
+            <a:r>
+              <a:rPr lang="de-DE" sz="1600" dirty="0"/>
+              <a:t>Nobody can efficiently find the relevant rule. Changes between versions are invisible. </a:t>
+            </a:r>
+          </a:p>
+          <a:p>
+            <a:pPr marL="0" indent="0">
+              <a:buNone/>
+            </a:pPr>
+            <a:r>
+              <a:rPr lang="de-DE" sz="1600" dirty="0"/>
+              <a:t>Rules are free text – and worse: they are interpreted by individuals based on their personal context, leading to inconsistent, non-deterministic application across organisations and countries.</a:t>
+            </a:r>
+            <a:endParaRPr lang="de-DE" sz="1400" dirty="0"/>
           </a:p>
         </p:txBody>
       </p:sp>
@@ -4294,22 +4300,32 @@
               <a:buNone/>
             </a:pPr>
             <a:r>
-              <a:rPr lang="de-DE" sz="1100" dirty="0"/>
-              <a:t>OSCAL4Rail – a lightweight profile of the NIST OSCAL standard adapted for railway regulations. Deterministic extraction pipeline: PDF + Excel matrix → validated, machine-readable YAML catalog. Every rule is verbatim-quoted, schema-validated, and diffable across versions.</a:t>
-            </a:r>
-            <a:r>
-              <a:rPr lang="de-DE" sz="1050" dirty="0" err="1"/>
-              <a:t/>
-            </a:r>
-            <a:r>
-              <a:rPr lang="de-DE" sz="1050" dirty="0"/>
-              <a:t/>
-            </a:r>
-            <a:r>
-              <a:rPr lang="de-DE" sz="1050" dirty="0" err="1"/>
-              <a:t/>
-            </a:r>
-            <a:endParaRPr lang="de-DE" sz="1050" dirty="0"/>
+              <a:rPr lang="de-DE" sz="1600" dirty="0"/>
+              <a:t>OSCAL4Rail – a lightweight profile of the NIST OSCAL standard adapted for railway regulations. </a:t>
+            </a:r>
+          </a:p>
+          <a:p>
+            <a:pPr marL="0" indent="0">
+              <a:buNone/>
+            </a:pPr>
+            <a:r>
+              <a:rPr lang="de-DE" sz="1600" dirty="0" err="1"/>
+              <a:t>Deterministic</a:t>
+            </a:r>
+            <a:r>
+              <a:rPr lang="de-DE" sz="1600" dirty="0"/>
+              <a:t> extraction pipeline: PDF + Excel matrix → validated, machine-readable YAML catalog. </a:t>
+            </a:r>
+          </a:p>
+          <a:p>
+            <a:pPr marL="0" indent="0">
+              <a:buNone/>
+            </a:pPr>
+            <a:r>
+              <a:rPr lang="de-DE" sz="1600" dirty="0"/>
+              <a:t>Every rule is verbatim-quoted, schema-validated, and diffable across versions.</a:t>
+            </a:r>
+            <a:endParaRPr lang="de-DE" sz="1400" dirty="0"/>
           </a:p>
         </p:txBody>
       </p:sp>
@@ -4567,8 +4583,13 @@
           <a:p>
             <a:r>
               <a:rPr lang="de-DE" sz="1100" dirty="0"/>
-              <a:t>GitHub Repository: https://github.com/OpenRail-Playground/A38</a:t>
-            </a:r>
+              <a:t>GitHub Repository: https://github.com/OpenRail-Playground/A38/</a:t>
+            </a:r>
+            <a:r>
+              <a:rPr lang="de-DE" sz="1100" dirty="0" err="1"/>
+              <a:t>whomakestherules</a:t>
+            </a:r>
+            <a:endParaRPr lang="de-DE" sz="1100" dirty="0"/>
           </a:p>
           <a:p>
             <a:r>
@@ -4648,21 +4669,12 @@
           </a:bodyPr>
           <a:lstStyle/>
           <a:p>
+            <a:pPr marL="0" indent="0">
+              <a:buNone/>
+            </a:pPr>
             <a:r>
               <a:rPr lang="de-DE" sz="1100" dirty="0"/>
               <a:t>Standards bodies (KKI, BAV), railway companies (SBB, DB, OeBB, SNCF), compliance teams, IT departments implementing passenger information systems.</a:t>
-            </a:r>
-            <a:r>
-              <a:rPr lang="de-DE" sz="1050" dirty="0" err="1"/>
-              <a:t/>
-            </a:r>
-            <a:r>
-              <a:rPr lang="de-DE" sz="1050" dirty="0"/>
-              <a:t/>
-            </a:r>
-            <a:r>
-              <a:rPr lang="de-DE" sz="1050" dirty="0" err="1"/>
-              <a:t/>
             </a:r>
             <a:endParaRPr lang="de-DE" sz="1050" dirty="0"/>
           </a:p>
@@ -4934,21 +4946,12 @@
             </a:lvl9pPr>
           </a:lstStyle>
           <a:p>
+            <a:pPr marL="0" indent="0">
+              <a:buNone/>
+            </a:pPr>
             <a:r>
               <a:rPr lang="de-DE" sz="1100" dirty="0"/>
               <a:t>Manual PDF reading, proprietary compliance tools. No open standard for railway regulations exists.</a:t>
-            </a:r>
-            <a:r>
-              <a:rPr lang="de-DE" sz="1050" dirty="0" err="1"/>
-              <a:t/>
-            </a:r>
-            <a:r>
-              <a:rPr lang="de-DE" sz="1050" dirty="0"/>
-              <a:t/>
-            </a:r>
-            <a:r>
-              <a:rPr lang="de-DE" sz="1050" dirty="0" err="1"/>
-              <a:t/>
             </a:r>
             <a:endParaRPr lang="de-DE" sz="1050" dirty="0"/>
           </a:p>
@@ -5220,21 +5223,12 @@
             </a:lvl9pPr>
           </a:lstStyle>
           <a:p>
+            <a:pPr marL="0" indent="0">
+              <a:buNone/>
+            </a:pPr>
             <a:r>
               <a:rPr lang="de-DE" sz="1100" dirty="0"/>
               <a:t>Reduced compliance effort: automated change tracking eliminates manual document comparison. Faster implementation of regulation updates across systems.</a:t>
-            </a:r>
-            <a:r>
-              <a:rPr lang="de-DE" sz="1050" dirty="0" err="1"/>
-              <a:t/>
-            </a:r>
-            <a:r>
-              <a:rPr lang="de-DE" sz="1050" dirty="0"/>
-              <a:t/>
-            </a:r>
-            <a:r>
-              <a:rPr lang="de-DE" sz="1050" dirty="0" err="1"/>
-              <a:t/>
             </a:r>
             <a:endParaRPr lang="de-DE" sz="1050" dirty="0"/>
           </a:p>
@@ -5503,21 +5497,12 @@
             </a:lvl9pPr>
           </a:lstStyle>
           <a:p>
+            <a:pPr marL="0" indent="0">
+              <a:buNone/>
+            </a:pPr>
             <a:r>
               <a:rPr lang="de-DE" sz="1100" dirty="0"/>
               <a:t>Proprietary formats (vendor lock-in). Pure LLM extraction without validation (non-deterministic, not auditable).</a:t>
-            </a:r>
-            <a:r>
-              <a:rPr lang="de-DE" sz="1050" dirty="0" err="1"/>
-              <a:t/>
-            </a:r>
-            <a:r>
-              <a:rPr lang="de-DE" sz="1050" dirty="0"/>
-              <a:t/>
-            </a:r>
-            <a:r>
-              <a:rPr lang="de-DE" sz="1050" dirty="0" err="1"/>
-              <a:t/>
             </a:r>
             <a:endParaRPr lang="de-DE" sz="1050" dirty="0"/>
           </a:p>
@@ -5795,21 +5780,12 @@
             </a:lvl9pPr>
           </a:lstStyle>
           <a:p>
+            <a:pPr marL="0" indent="0">
+              <a:buNone/>
+            </a:pPr>
             <a:r>
               <a:rPr lang="de-DE" sz="1100" dirty="0"/>
               <a:t>Interoperability between railway companies. Faster adoption of new standards. Transparency for passengers (consistent information across borders).</a:t>
-            </a:r>
-            <a:r>
-              <a:rPr lang="de-DE" sz="1050" dirty="0" err="1"/>
-              <a:t/>
-            </a:r>
-            <a:r>
-              <a:rPr lang="de-DE" sz="1050" dirty="0"/>
-              <a:t/>
-            </a:r>
-            <a:r>
-              <a:rPr lang="de-DE" sz="1050" dirty="0" err="1"/>
-              <a:t/>
             </a:r>
             <a:endParaRPr lang="de-DE" sz="1050" dirty="0"/>
           </a:p>
@@ -6090,21 +6066,12 @@
             </a:lvl9pPr>
           </a:lstStyle>
           <a:p>
+            <a:pPr marL="0" indent="0">
+              <a:buNone/>
+            </a:pPr>
             <a:r>
               <a:rPr lang="de-DE" sz="1100" dirty="0"/>
               <a:t>Adoption requires buy-in from standards bodies. Regulations must keep stable chapter numbering. Multi-language support (DE/FR/IT) needs further work.</a:t>
-            </a:r>
-            <a:r>
-              <a:rPr lang="de-DE" sz="1050" dirty="0" err="1"/>
-              <a:t/>
-            </a:r>
-            <a:r>
-              <a:rPr lang="de-DE" sz="1050" dirty="0"/>
-              <a:t/>
-            </a:r>
-            <a:r>
-              <a:rPr lang="de-DE" sz="1050" dirty="0" err="1"/>
-              <a:t/>
             </a:r>
             <a:endParaRPr lang="de-DE" sz="1050" dirty="0"/>
           </a:p>
@@ -6385,21 +6352,12 @@
             </a:lvl9pPr>
           </a:lstStyle>
           <a:p>
+            <a:pPr marL="0" indent="0">
+              <a:buNone/>
+            </a:pPr>
             <a:r>
               <a:rPr lang="de-DE" sz="1100" dirty="0"/>
               <a:t>NIST OSCAL: mature (v1.1.3, used in US government). OSCAL4Rail profile: prototype (Hack4Rail 2026). Python tooling: production-ready libraries.</a:t>
-            </a:r>
-            <a:r>
-              <a:rPr lang="de-DE" sz="1050" dirty="0" err="1"/>
-              <a:t/>
-            </a:r>
-            <a:r>
-              <a:rPr lang="de-DE" sz="1050" dirty="0"/>
-              <a:t/>
-            </a:r>
-            <a:r>
-              <a:rPr lang="de-DE" sz="1050" dirty="0" err="1"/>
-              <a:t/>
             </a:r>
             <a:endParaRPr lang="de-DE" sz="1050" dirty="0"/>
           </a:p>
@@ -6676,21 +6634,12 @@
             </a:lvl9pPr>
           </a:lstStyle>
           <a:p>
+            <a:pPr marL="0" indent="0">
+              <a:buNone/>
+            </a:pPr>
             <a:r>
               <a:rPr lang="de-DE" sz="1100" dirty="0"/>
               <a:t>May depend on the railway company.</a:t>
-            </a:r>
-            <a:r>
-              <a:rPr lang="de-DE" sz="1050" dirty="0" err="1"/>
-              <a:t/>
-            </a:r>
-            <a:r>
-              <a:rPr lang="de-DE" sz="1050" dirty="0"/>
-              <a:t/>
-            </a:r>
-            <a:r>
-              <a:rPr lang="de-DE" sz="1050" dirty="0" err="1"/>
-              <a:t/>
             </a:r>
             <a:endParaRPr lang="de-DE" sz="1050" dirty="0"/>
           </a:p>
@@ -7101,6 +7050,18 @@
 </file>
 
 <file path=customXml/item1.xml><?xml version="1.0" encoding="utf-8"?>
+<p:properties xmlns:p="http://schemas.microsoft.com/office/2006/metadata/properties" xmlns:xsi="http://www.w3.org/2001/XMLSchema-instance" xmlns:pc="http://schemas.microsoft.com/office/infopath/2007/PartnerControls">
+  <documentManagement>
+    <Copyright xmlns="b106c448-c3d1-41cc-8fd9-3acb307364b4" xsi:nil="true"/>
+    <lcf76f155ced4ddcb4097134ff3c332f xmlns="b106c448-c3d1-41cc-8fd9-3acb307364b4">
+      <Terms xmlns="http://schemas.microsoft.com/office/infopath/2007/PartnerControls"/>
+    </lcf76f155ced4ddcb4097134ff3c332f>
+    <TaxCatchAll xmlns="b043894e-b4c8-44d0-9690-d7947297ac19" xsi:nil="true"/>
+  </documentManagement>
+</p:properties>
+</file>
+
+<file path=customXml/item2.xml><?xml version="1.0" encoding="utf-8"?>
 <?mso-contentType ?>
 <FormTemplates xmlns="http://schemas.microsoft.com/sharepoint/v3/contenttype/forms">
   <Display>DocumentLibraryForm</Display>
@@ -7109,7 +7070,7 @@
 </FormTemplates>
 </file>
 
-<file path=customXml/item2.xml><?xml version="1.0" encoding="utf-8"?>
+<file path=customXml/item3.xml><?xml version="1.0" encoding="utf-8"?>
 <ct:contentTypeSchema xmlns:ct="http://schemas.microsoft.com/office/2006/metadata/contentType" xmlns:ma="http://schemas.microsoft.com/office/2006/metadata/properties/metaAttributes" ct:_="" ma:_="" ma:contentTypeName="Dokument" ma:contentTypeID="0x010100C5895299445B8C4DB378BBB718B1F939" ma:contentTypeVersion="17" ma:contentTypeDescription="Ein neues Dokument erstellen." ma:contentTypeScope="" ma:versionID="efa937a253b8a0ad253458d0295c9a6c">
   <xsd:schema xmlns:xsd="http://www.w3.org/2001/XMLSchema" xmlns:xs="http://www.w3.org/2001/XMLSchema" xmlns:p="http://schemas.microsoft.com/office/2006/metadata/properties" xmlns:ns2="b106c448-c3d1-41cc-8fd9-3acb307364b4" xmlns:ns3="b043894e-b4c8-44d0-9690-d7947297ac19" targetNamespace="http://schemas.microsoft.com/office/2006/metadata/properties" ma:root="true" ma:fieldsID="af1e72e99746a9a12b0b64b9fe407f72" ns2:_="" ns3:_="">
     <xsd:import namespace="b106c448-c3d1-41cc-8fd9-3acb307364b4"/>
@@ -7348,19 +7309,18 @@
 </ct:contentTypeSchema>
 </file>
 
-<file path=customXml/item3.xml><?xml version="1.0" encoding="utf-8"?>
-<p:properties xmlns:p="http://schemas.microsoft.com/office/2006/metadata/properties" xmlns:xsi="http://www.w3.org/2001/XMLSchema-instance" xmlns:pc="http://schemas.microsoft.com/office/infopath/2007/PartnerControls">
-  <documentManagement>
-    <Copyright xmlns="b106c448-c3d1-41cc-8fd9-3acb307364b4" xsi:nil="true"/>
-    <lcf76f155ced4ddcb4097134ff3c332f xmlns="b106c448-c3d1-41cc-8fd9-3acb307364b4">
-      <Terms xmlns="http://schemas.microsoft.com/office/infopath/2007/PartnerControls"/>
-    </lcf76f155ced4ddcb4097134ff3c332f>
-    <TaxCatchAll xmlns="b043894e-b4c8-44d0-9690-d7947297ac19" xsi:nil="true"/>
-  </documentManagement>
-</p:properties>
+<file path=customXml/itemProps1.xml><?xml version="1.0" encoding="utf-8"?>
+<ds:datastoreItem xmlns:ds="http://schemas.openxmlformats.org/officeDocument/2006/customXml" ds:itemID="{BB3B6C51-77D4-4F63-A8EC-8C7A763498FB}">
+  <ds:schemaRefs>
+    <ds:schemaRef ds:uri="http://schemas.microsoft.com/office/2006/metadata/properties"/>
+    <ds:schemaRef ds:uri="http://schemas.microsoft.com/office/infopath/2007/PartnerControls"/>
+    <ds:schemaRef ds:uri="b106c448-c3d1-41cc-8fd9-3acb307364b4"/>
+    <ds:schemaRef ds:uri="b043894e-b4c8-44d0-9690-d7947297ac19"/>
+  </ds:schemaRefs>
+</ds:datastoreItem>
 </file>
 
-<file path=customXml/itemProps1.xml><?xml version="1.0" encoding="utf-8"?>
+<file path=customXml/itemProps2.xml><?xml version="1.0" encoding="utf-8"?>
 <ds:datastoreItem xmlns:ds="http://schemas.openxmlformats.org/officeDocument/2006/customXml" ds:itemID="{5DD488EB-8795-4A31-B76F-16B318CFE1F7}">
   <ds:schemaRefs>
     <ds:schemaRef ds:uri="http://schemas.microsoft.com/sharepoint/v3/contenttype/forms"/>
@@ -7368,7 +7328,7 @@
 </ds:datastoreItem>
 </file>
 
-<file path=customXml/itemProps2.xml><?xml version="1.0" encoding="utf-8"?>
+<file path=customXml/itemProps3.xml><?xml version="1.0" encoding="utf-8"?>
 <ds:datastoreItem xmlns:ds="http://schemas.openxmlformats.org/officeDocument/2006/customXml" ds:itemID="{B4D14693-25A4-4C1A-ABDC-E6E0CFF1A69C}">
   <ds:schemaRefs>
     <ds:schemaRef ds:uri="http://schemas.microsoft.com/office/2006/metadata/contentType"/>
@@ -7387,17 +7347,6 @@
 </ds:datastoreItem>
 </file>
 
-<file path=customXml/itemProps3.xml><?xml version="1.0" encoding="utf-8"?>
-<ds:datastoreItem xmlns:ds="http://schemas.openxmlformats.org/officeDocument/2006/customXml" ds:itemID="{BB3B6C51-77D4-4F63-A8EC-8C7A763498FB}">
-  <ds:schemaRefs>
-    <ds:schemaRef ds:uri="http://schemas.microsoft.com/office/2006/metadata/properties"/>
-    <ds:schemaRef ds:uri="http://schemas.microsoft.com/office/infopath/2007/PartnerControls"/>
-    <ds:schemaRef ds:uri="b106c448-c3d1-41cc-8fd9-3acb307364b4"/>
-    <ds:schemaRef ds:uri="b043894e-b4c8-44d0-9690-d7947297ac19"/>
-  </ds:schemaRefs>
-</ds:datastoreItem>
-</file>
-
 <file path=docMetadata/LabelInfo.xml><?xml version="1.0" encoding="utf-8"?>
 <clbl:labelList xmlns:clbl="http://schemas.microsoft.com/office/2020/mipLabelMetadata">
   <clbl:label id="{0cda0c22-3e77-43b9-8faf-0bad2baf7893}" enabled="1" method="Standard" siteId="{085c0b65-6a84-4006-851e-5faa7ec5367e}" contentBits="2" removed="0"/>
